--- a/Power+BI+Project+1+Requirements.pptx
+++ b/Power+BI+Project+1+Requirements.pptx
@@ -5,9 +5,7 @@
     <p:sldMasterId id="2147483660" r:id="rId1"/>
   </p:sldMasterIdLst>
   <p:sldIdLst>
-    <p:sldId id="256" r:id="rId2"/>
-    <p:sldId id="257" r:id="rId3"/>
-    <p:sldId id="258" r:id="rId4"/>
+    <p:sldId id="258" r:id="rId2"/>
   </p:sldIdLst>
   <p:sldSz cx="12192000" cy="6858000"/>
   <p:notesSz cx="6858000" cy="9144000"/>
@@ -449,7 +447,7 @@
           <a:p>
             <a:fld id="{122C3E79-63E1-40B5-9970-B4B38E9F7EB9}" type="datetimeFigureOut">
               <a:rPr lang="en-IN" smtClean="0"/>
-              <a:t>04-07-2024</a:t>
+              <a:t>31-03-2026</a:t>
             </a:fld>
             <a:endParaRPr lang="en-IN"/>
           </a:p>
@@ -1537,7 +1535,7 @@
           <a:p>
             <a:fld id="{122C3E79-63E1-40B5-9970-B4B38E9F7EB9}" type="datetimeFigureOut">
               <a:rPr lang="en-IN" smtClean="0"/>
-              <a:t>04-07-2024</a:t>
+              <a:t>31-03-2026</a:t>
             </a:fld>
             <a:endParaRPr lang="en-IN"/>
           </a:p>
@@ -2517,7 +2515,7 @@
           <a:p>
             <a:fld id="{122C3E79-63E1-40B5-9970-B4B38E9F7EB9}" type="datetimeFigureOut">
               <a:rPr lang="en-IN" smtClean="0"/>
-              <a:t>04-07-2024</a:t>
+              <a:t>31-03-2026</a:t>
             </a:fld>
             <a:endParaRPr lang="en-IN"/>
           </a:p>
@@ -3651,7 +3649,7 @@
           <a:p>
             <a:fld id="{122C3E79-63E1-40B5-9970-B4B38E9F7EB9}" type="datetimeFigureOut">
               <a:rPr lang="en-IN" smtClean="0"/>
-              <a:t>04-07-2024</a:t>
+              <a:t>31-03-2026</a:t>
             </a:fld>
             <a:endParaRPr lang="en-IN"/>
           </a:p>
@@ -4684,7 +4682,7 @@
           <a:p>
             <a:fld id="{122C3E79-63E1-40B5-9970-B4B38E9F7EB9}" type="datetimeFigureOut">
               <a:rPr lang="en-IN" smtClean="0"/>
-              <a:t>04-07-2024</a:t>
+              <a:t>31-03-2026</a:t>
             </a:fld>
             <a:endParaRPr lang="en-IN"/>
           </a:p>
@@ -5344,7 +5342,7 @@
           <a:p>
             <a:fld id="{122C3E79-63E1-40B5-9970-B4B38E9F7EB9}" type="datetimeFigureOut">
               <a:rPr lang="en-IN" smtClean="0"/>
-              <a:t>04-07-2024</a:t>
+              <a:t>31-03-2026</a:t>
             </a:fld>
             <a:endParaRPr lang="en-IN"/>
           </a:p>
@@ -6205,7 +6203,7 @@
           <a:p>
             <a:fld id="{122C3E79-63E1-40B5-9970-B4B38E9F7EB9}" type="datetimeFigureOut">
               <a:rPr lang="en-IN" smtClean="0"/>
-              <a:t>04-07-2024</a:t>
+              <a:t>31-03-2026</a:t>
             </a:fld>
             <a:endParaRPr lang="en-IN"/>
           </a:p>
@@ -6395,7 +6393,7 @@
           <a:p>
             <a:fld id="{122C3E79-63E1-40B5-9970-B4B38E9F7EB9}" type="datetimeFigureOut">
               <a:rPr lang="en-IN" smtClean="0"/>
-              <a:t>04-07-2024</a:t>
+              <a:t>31-03-2026</a:t>
             </a:fld>
             <a:endParaRPr lang="en-IN"/>
           </a:p>
@@ -7367,7 +7365,7 @@
           <a:p>
             <a:fld id="{122C3E79-63E1-40B5-9970-B4B38E9F7EB9}" type="datetimeFigureOut">
               <a:rPr lang="en-IN" smtClean="0"/>
-              <a:t>04-07-2024</a:t>
+              <a:t>31-03-2026</a:t>
             </a:fld>
             <a:endParaRPr lang="en-IN"/>
           </a:p>
@@ -7578,7 +7576,7 @@
           <a:p>
             <a:fld id="{122C3E79-63E1-40B5-9970-B4B38E9F7EB9}" type="datetimeFigureOut">
               <a:rPr lang="en-IN" smtClean="0"/>
-              <a:t>04-07-2024</a:t>
+              <a:t>31-03-2026</a:t>
             </a:fld>
             <a:endParaRPr lang="en-IN"/>
           </a:p>
@@ -8612,7 +8610,7 @@
           <a:p>
             <a:fld id="{122C3E79-63E1-40B5-9970-B4B38E9F7EB9}" type="datetimeFigureOut">
               <a:rPr lang="en-IN" smtClean="0"/>
-              <a:t>04-07-2024</a:t>
+              <a:t>31-03-2026</a:t>
             </a:fld>
             <a:endParaRPr lang="en-IN"/>
           </a:p>
@@ -8884,7 +8882,7 @@
           <a:p>
             <a:fld id="{122C3E79-63E1-40B5-9970-B4B38E9F7EB9}" type="datetimeFigureOut">
               <a:rPr lang="en-IN" smtClean="0"/>
-              <a:t>04-07-2024</a:t>
+              <a:t>31-03-2026</a:t>
             </a:fld>
             <a:endParaRPr lang="en-IN"/>
           </a:p>
@@ -9294,7 +9292,7 @@
           <a:p>
             <a:fld id="{122C3E79-63E1-40B5-9970-B4B38E9F7EB9}" type="datetimeFigureOut">
               <a:rPr lang="en-IN" smtClean="0"/>
-              <a:t>04-07-2024</a:t>
+              <a:t>31-03-2026</a:t>
             </a:fld>
             <a:endParaRPr lang="en-IN"/>
           </a:p>
@@ -9421,7 +9419,7 @@
           <a:p>
             <a:fld id="{122C3E79-63E1-40B5-9970-B4B38E9F7EB9}" type="datetimeFigureOut">
               <a:rPr lang="en-IN" smtClean="0"/>
-              <a:t>04-07-2024</a:t>
+              <a:t>31-03-2026</a:t>
             </a:fld>
             <a:endParaRPr lang="en-IN"/>
           </a:p>
@@ -9516,7 +9514,7 @@
           <a:p>
             <a:fld id="{122C3E79-63E1-40B5-9970-B4B38E9F7EB9}" type="datetimeFigureOut">
               <a:rPr lang="en-IN" smtClean="0"/>
-              <a:t>04-07-2024</a:t>
+              <a:t>31-03-2026</a:t>
             </a:fld>
             <a:endParaRPr lang="en-IN"/>
           </a:p>
@@ -10597,7 +10595,7 @@
           <a:p>
             <a:fld id="{122C3E79-63E1-40B5-9970-B4B38E9F7EB9}" type="datetimeFigureOut">
               <a:rPr lang="en-IN" smtClean="0"/>
-              <a:t>04-07-2024</a:t>
+              <a:t>31-03-2026</a:t>
             </a:fld>
             <a:endParaRPr lang="en-IN"/>
           </a:p>
@@ -11705,7 +11703,7 @@
           <a:p>
             <a:fld id="{122C3E79-63E1-40B5-9970-B4B38E9F7EB9}" type="datetimeFigureOut">
               <a:rPr lang="en-IN" smtClean="0"/>
-              <a:t>04-07-2024</a:t>
+              <a:t>31-03-2026</a:t>
             </a:fld>
             <a:endParaRPr lang="en-IN"/>
           </a:p>
@@ -12702,7 +12700,7 @@
           <a:p>
             <a:fld id="{122C3E79-63E1-40B5-9970-B4B38E9F7EB9}" type="datetimeFigureOut">
               <a:rPr lang="en-IN" smtClean="0"/>
-              <a:t>04-07-2024</a:t>
+              <a:t>31-03-2026</a:t>
             </a:fld>
             <a:endParaRPr lang="en-IN"/>
           </a:p>
@@ -13247,1090 +13245,6 @@
 <file path=ppt/slides/slide1.xml><?xml version="1.0" encoding="utf-8"?>
 <p:sld xmlns:a="http://schemas.openxmlformats.org/drawingml/2006/main" xmlns:r="http://schemas.openxmlformats.org/officeDocument/2006/relationships" xmlns:p="http://schemas.openxmlformats.org/presentationml/2006/main">
   <p:cSld>
-    <p:bg>
-      <p:bgPr>
-        <a:blipFill rotWithShape="1">
-          <a:blip r:embed="rId2">
-            <a:duotone>
-              <a:schemeClr val="bg2">
-                <a:shade val="69000"/>
-                <a:hueMod val="91000"/>
-                <a:satMod val="164000"/>
-                <a:lumMod val="74000"/>
-              </a:schemeClr>
-              <a:schemeClr val="bg2">
-                <a:hueMod val="124000"/>
-                <a:satMod val="140000"/>
-                <a:lumMod val="142000"/>
-              </a:schemeClr>
-            </a:duotone>
-          </a:blip>
-          <a:stretch/>
-        </a:blipFill>
-        <a:effectLst/>
-      </p:bgPr>
-    </p:bg>
-    <p:spTree>
-      <p:nvGrpSpPr>
-        <p:cNvPr id="1" name=""/>
-        <p:cNvGrpSpPr/>
-        <p:nvPr/>
-      </p:nvGrpSpPr>
-      <p:grpSpPr>
-        <a:xfrm>
-          <a:off x="0" y="0"/>
-          <a:ext cx="0" cy="0"/>
-          <a:chOff x="0" y="0"/>
-          <a:chExt cx="0" cy="0"/>
-        </a:xfrm>
-      </p:grpSpPr>
-      <p:grpSp>
-        <p:nvGrpSpPr>
-          <p:cNvPr id="43" name="Group 42">
-            <a:extLst>
-              <a:ext uri="{FF2B5EF4-FFF2-40B4-BE49-F238E27FC236}">
-                <a16:creationId xmlns:a16="http://schemas.microsoft.com/office/drawing/2014/main" id="{93E10248-AF0E-477D-B4D2-47C02CE4E353}"/>
-              </a:ext>
-              <a:ext uri="{C183D7F6-B498-43B3-948B-1728B52AA6E4}">
-                <adec:decorative xmlns:adec="http://schemas.microsoft.com/office/drawing/2017/decorative" val="1"/>
-              </a:ext>
-            </a:extLst>
-          </p:cNvPr>
-          <p:cNvGrpSpPr>
-            <a:grpSpLocks noGrp="1" noUngrp="1" noRot="1" noChangeAspect="1" noMove="1" noResize="1"/>
-          </p:cNvGrpSpPr>
-          <p:nvPr>
-            <p:extLst>
-              <p:ext uri="{386F3935-93C4-4BCD-93E2-E3B085C9AB24}">
-                <p16:designElem xmlns:p16="http://schemas.microsoft.com/office/powerpoint/2015/main" val="1"/>
-              </p:ext>
-            </p:extLst>
-          </p:nvPr>
-        </p:nvGrpSpPr>
-        <p:grpSpPr>
-          <a:xfrm>
-            <a:off x="0" y="0"/>
-            <a:ext cx="12192000" cy="6858000"/>
-            <a:chOff x="0" y="0"/>
-            <a:chExt cx="12192000" cy="6858000"/>
-          </a:xfrm>
-        </p:grpSpPr>
-        <p:sp>
-          <p:nvSpPr>
-            <p:cNvPr id="44" name="Rectangle 43">
-              <a:extLst>
-                <a:ext uri="{FF2B5EF4-FFF2-40B4-BE49-F238E27FC236}">
-                  <a16:creationId xmlns:a16="http://schemas.microsoft.com/office/drawing/2014/main" id="{533010C2-2DA5-460F-A40C-5317F567A03E}"/>
-                </a:ext>
-                <a:ext uri="{C183D7F6-B498-43B3-948B-1728B52AA6E4}">
-                  <adec:decorative xmlns:adec="http://schemas.microsoft.com/office/drawing/2017/decorative" val="1"/>
-                </a:ext>
-              </a:extLst>
-            </p:cNvPr>
-            <p:cNvSpPr/>
-            <p:nvPr>
-              <p:extLst>
-                <p:ext uri="{386F3935-93C4-4BCD-93E2-E3B085C9AB24}">
-                  <p16:designElem xmlns:p16="http://schemas.microsoft.com/office/powerpoint/2015/main" val="1"/>
-                </p:ext>
-              </p:extLst>
-            </p:nvPr>
-          </p:nvSpPr>
-          <p:spPr>
-            <a:xfrm>
-              <a:off x="0" y="0"/>
-              <a:ext cx="12192000" cy="6858000"/>
-            </a:xfrm>
-            <a:prstGeom prst="rect">
-              <a:avLst/>
-            </a:prstGeom>
-            <a:blipFill>
-              <a:blip r:embed="rId2">
-                <a:duotone>
-                  <a:schemeClr val="dk2">
-                    <a:shade val="69000"/>
-                    <a:hueMod val="91000"/>
-                    <a:satMod val="164000"/>
-                    <a:lumMod val="74000"/>
-                  </a:schemeClr>
-                  <a:schemeClr val="dk2">
-                    <a:hueMod val="124000"/>
-                    <a:satMod val="140000"/>
-                    <a:lumMod val="142000"/>
-                  </a:schemeClr>
-                </a:duotone>
-              </a:blip>
-              <a:stretch>
-                <a:fillRect/>
-              </a:stretch>
-            </a:blipFill>
-            <a:ln>
-              <a:noFill/>
-            </a:ln>
-          </p:spPr>
-          <p:style>
-            <a:lnRef idx="2">
-              <a:schemeClr val="accent1">
-                <a:shade val="50000"/>
-              </a:schemeClr>
-            </a:lnRef>
-            <a:fillRef idx="1">
-              <a:schemeClr val="accent1"/>
-            </a:fillRef>
-            <a:effectRef idx="0">
-              <a:schemeClr val="accent1"/>
-            </a:effectRef>
-            <a:fontRef idx="minor">
-              <a:schemeClr val="lt1"/>
-            </a:fontRef>
-          </p:style>
-          <p:txBody>
-            <a:bodyPr/>
-            <a:lstStyle/>
-            <a:p>
-              <a:endParaRPr lang="en-IN"/>
-            </a:p>
-          </p:txBody>
-        </p:sp>
-        <p:sp>
-          <p:nvSpPr>
-            <p:cNvPr id="45" name="Freeform 5">
-              <a:extLst>
-                <a:ext uri="{FF2B5EF4-FFF2-40B4-BE49-F238E27FC236}">
-                  <a16:creationId xmlns:a16="http://schemas.microsoft.com/office/drawing/2014/main" id="{17CB0634-F963-4EC9-A6F6-8EA46BD1F103}"/>
-                </a:ext>
-                <a:ext uri="{C183D7F6-B498-43B3-948B-1728B52AA6E4}">
-                  <adec:decorative xmlns:adec="http://schemas.microsoft.com/office/drawing/2017/decorative" val="1"/>
-                </a:ext>
-              </a:extLst>
-            </p:cNvPr>
-            <p:cNvSpPr>
-              <a:spLocks noEditPoints="1"/>
-            </p:cNvSpPr>
-            <p:nvPr>
-              <p:extLst>
-                <p:ext uri="{386F3935-93C4-4BCD-93E2-E3B085C9AB24}">
-                  <p16:designElem xmlns:p16="http://schemas.microsoft.com/office/powerpoint/2015/main" val="1"/>
-                </p:ext>
-              </p:extLst>
-            </p:nvPr>
-          </p:nvSpPr>
-          <p:spPr bwMode="gray">
-            <a:xfrm>
-              <a:off x="0" y="1587"/>
-              <a:ext cx="12192000" cy="6856413"/>
-            </a:xfrm>
-            <a:custGeom>
-              <a:avLst/>
-              <a:gdLst/>
-              <a:ahLst/>
-              <a:cxnLst/>
-              <a:rect l="0" t="0" r="r" b="b"/>
-              <a:pathLst>
-                <a:path w="15356" h="8638">
-                  <a:moveTo>
-                    <a:pt x="0" y="0"/>
-                  </a:moveTo>
-                  <a:lnTo>
-                    <a:pt x="0" y="8638"/>
-                  </a:lnTo>
-                  <a:lnTo>
-                    <a:pt x="15356" y="8638"/>
-                  </a:lnTo>
-                  <a:lnTo>
-                    <a:pt x="15356" y="0"/>
-                  </a:lnTo>
-                  <a:lnTo>
-                    <a:pt x="0" y="0"/>
-                  </a:lnTo>
-                  <a:close/>
-                  <a:moveTo>
-                    <a:pt x="14748" y="8038"/>
-                  </a:moveTo>
-                  <a:lnTo>
-                    <a:pt x="600" y="8038"/>
-                  </a:lnTo>
-                  <a:lnTo>
-                    <a:pt x="600" y="592"/>
-                  </a:lnTo>
-                  <a:lnTo>
-                    <a:pt x="14748" y="592"/>
-                  </a:lnTo>
-                  <a:lnTo>
-                    <a:pt x="14748" y="8038"/>
-                  </a:lnTo>
-                  <a:close/>
-                </a:path>
-              </a:pathLst>
-            </a:custGeom>
-            <a:solidFill>
-              <a:schemeClr val="bg1"/>
-            </a:solidFill>
-            <a:ln>
-              <a:noFill/>
-            </a:ln>
-          </p:spPr>
-          <p:txBody>
-            <a:bodyPr/>
-            <a:lstStyle/>
-            <a:p>
-              <a:endParaRPr lang="en-IN"/>
-            </a:p>
-          </p:txBody>
-        </p:sp>
-      </p:grpSp>
-      <p:sp>
-        <p:nvSpPr>
-          <p:cNvPr id="46" name="Rectangle 45">
-            <a:extLst>
-              <a:ext uri="{FF2B5EF4-FFF2-40B4-BE49-F238E27FC236}">
-                <a16:creationId xmlns:a16="http://schemas.microsoft.com/office/drawing/2014/main" id="{73C0A186-7444-4460-9C37-532E7671E99E}"/>
-              </a:ext>
-              <a:ext uri="{C183D7F6-B498-43B3-948B-1728B52AA6E4}">
-                <adec:decorative xmlns:adec="http://schemas.microsoft.com/office/drawing/2017/decorative" val="1"/>
-              </a:ext>
-            </a:extLst>
-          </p:cNvPr>
-          <p:cNvSpPr>
-            <a:spLocks noGrp="1" noRot="1" noChangeAspect="1" noMove="1" noResize="1" noEditPoints="1" noAdjustHandles="1" noChangeArrowheads="1" noChangeShapeType="1" noTextEdit="1"/>
-          </p:cNvSpPr>
-          <p:nvPr>
-            <p:extLst>
-              <p:ext uri="{386F3935-93C4-4BCD-93E2-E3B085C9AB24}">
-                <p16:designElem xmlns:p16="http://schemas.microsoft.com/office/powerpoint/2015/main" val="1"/>
-              </p:ext>
-            </p:extLst>
-          </p:nvPr>
-        </p:nvSpPr>
-        <p:spPr>
-          <a:xfrm>
-            <a:off x="10437812" y="0"/>
-            <a:ext cx="685800" cy="1143000"/>
-          </a:xfrm>
-          <a:prstGeom prst="rect">
-            <a:avLst/>
-          </a:prstGeom>
-          <a:solidFill>
-            <a:schemeClr val="accent1"/>
-          </a:solidFill>
-          <a:ln>
-            <a:noFill/>
-          </a:ln>
-        </p:spPr>
-        <p:style>
-          <a:lnRef idx="1">
-            <a:schemeClr val="accent1"/>
-          </a:lnRef>
-          <a:fillRef idx="3">
-            <a:schemeClr val="accent1"/>
-          </a:fillRef>
-          <a:effectRef idx="2">
-            <a:schemeClr val="accent1"/>
-          </a:effectRef>
-          <a:fontRef idx="minor">
-            <a:schemeClr val="lt1"/>
-          </a:fontRef>
-        </p:style>
-        <p:txBody>
-          <a:bodyPr/>
-          <a:lstStyle/>
-          <a:p>
-            <a:endParaRPr lang="en-IN"/>
-          </a:p>
-        </p:txBody>
-      </p:sp>
-      <p:grpSp>
-        <p:nvGrpSpPr>
-          <p:cNvPr id="47" name="Group 46">
-            <a:extLst>
-              <a:ext uri="{FF2B5EF4-FFF2-40B4-BE49-F238E27FC236}">
-                <a16:creationId xmlns:a16="http://schemas.microsoft.com/office/drawing/2014/main" id="{F1ECA4FE-7D2F-4576-B767-3A5F5ABFE90F}"/>
-              </a:ext>
-              <a:ext uri="{C183D7F6-B498-43B3-948B-1728B52AA6E4}">
-                <adec:decorative xmlns:adec="http://schemas.microsoft.com/office/drawing/2017/decorative" val="1"/>
-              </a:ext>
-            </a:extLst>
-          </p:cNvPr>
-          <p:cNvGrpSpPr>
-            <a:grpSpLocks noGrp="1" noUngrp="1" noRot="1" noChangeAspect="1" noMove="1" noResize="1"/>
-          </p:cNvGrpSpPr>
-          <p:nvPr>
-            <p:extLst>
-              <p:ext uri="{386F3935-93C4-4BCD-93E2-E3B085C9AB24}">
-                <p16:designElem xmlns:p16="http://schemas.microsoft.com/office/powerpoint/2015/main" val="1"/>
-              </p:ext>
-            </p:extLst>
-          </p:nvPr>
-        </p:nvGrpSpPr>
-        <p:grpSpPr>
-          <a:xfrm>
-            <a:off x="0" y="0"/>
-            <a:ext cx="12192000" cy="6858000"/>
-            <a:chOff x="0" y="0"/>
-            <a:chExt cx="12192000" cy="6858000"/>
-          </a:xfrm>
-        </p:grpSpPr>
-        <p:sp useBgFill="1">
-          <p:nvSpPr>
-            <p:cNvPr id="48" name="Rectangle 47">
-              <a:extLst>
-                <a:ext uri="{FF2B5EF4-FFF2-40B4-BE49-F238E27FC236}">
-                  <a16:creationId xmlns:a16="http://schemas.microsoft.com/office/drawing/2014/main" id="{5969441E-5462-4859-86CD-1737FDE36046}"/>
-                </a:ext>
-                <a:ext uri="{C183D7F6-B498-43B3-948B-1728B52AA6E4}">
-                  <adec:decorative xmlns:adec="http://schemas.microsoft.com/office/drawing/2017/decorative" val="1"/>
-                </a:ext>
-              </a:extLst>
-            </p:cNvPr>
-            <p:cNvSpPr/>
-            <p:nvPr>
-              <p:extLst>
-                <p:ext uri="{386F3935-93C4-4BCD-93E2-E3B085C9AB24}">
-                  <p16:designElem xmlns:p16="http://schemas.microsoft.com/office/powerpoint/2015/main" val="1"/>
-                </p:ext>
-              </p:extLst>
-            </p:nvPr>
-          </p:nvSpPr>
-          <p:spPr>
-            <a:xfrm>
-              <a:off x="0" y="0"/>
-              <a:ext cx="12192000" cy="6858000"/>
-            </a:xfrm>
-            <a:prstGeom prst="rect">
-              <a:avLst/>
-            </a:prstGeom>
-            <a:ln>
-              <a:noFill/>
-            </a:ln>
-          </p:spPr>
-          <p:style>
-            <a:lnRef idx="2">
-              <a:schemeClr val="accent1">
-                <a:shade val="50000"/>
-              </a:schemeClr>
-            </a:lnRef>
-            <a:fillRef idx="1">
-              <a:schemeClr val="accent1"/>
-            </a:fillRef>
-            <a:effectRef idx="0">
-              <a:schemeClr val="accent1"/>
-            </a:effectRef>
-            <a:fontRef idx="minor">
-              <a:schemeClr val="lt1"/>
-            </a:fontRef>
-          </p:style>
-          <p:txBody>
-            <a:bodyPr/>
-            <a:lstStyle/>
-            <a:p>
-              <a:endParaRPr lang="en-IN"/>
-            </a:p>
-          </p:txBody>
-        </p:sp>
-        <p:sp>
-          <p:nvSpPr>
-            <p:cNvPr id="49" name="Freeform 5">
-              <a:extLst>
-                <a:ext uri="{FF2B5EF4-FFF2-40B4-BE49-F238E27FC236}">
-                  <a16:creationId xmlns:a16="http://schemas.microsoft.com/office/drawing/2014/main" id="{596BD4B5-6833-40CC-96FE-EDC675634264}"/>
-                </a:ext>
-                <a:ext uri="{C183D7F6-B498-43B3-948B-1728B52AA6E4}">
-                  <adec:decorative xmlns:adec="http://schemas.microsoft.com/office/drawing/2017/decorative" val="1"/>
-                </a:ext>
-              </a:extLst>
-            </p:cNvPr>
-            <p:cNvSpPr>
-              <a:spLocks noEditPoints="1"/>
-            </p:cNvSpPr>
-            <p:nvPr>
-              <p:extLst>
-                <p:ext uri="{386F3935-93C4-4BCD-93E2-E3B085C9AB24}">
-                  <p16:designElem xmlns:p16="http://schemas.microsoft.com/office/powerpoint/2015/main" val="1"/>
-                </p:ext>
-              </p:extLst>
-            </p:nvPr>
-          </p:nvSpPr>
-          <p:spPr bwMode="gray">
-            <a:xfrm>
-              <a:off x="0" y="1587"/>
-              <a:ext cx="12192000" cy="6856413"/>
-            </a:xfrm>
-            <a:custGeom>
-              <a:avLst/>
-              <a:gdLst/>
-              <a:ahLst/>
-              <a:cxnLst/>
-              <a:rect l="0" t="0" r="r" b="b"/>
-              <a:pathLst>
-                <a:path w="15356" h="8638">
-                  <a:moveTo>
-                    <a:pt x="0" y="0"/>
-                  </a:moveTo>
-                  <a:lnTo>
-                    <a:pt x="0" y="8638"/>
-                  </a:lnTo>
-                  <a:lnTo>
-                    <a:pt x="15356" y="8638"/>
-                  </a:lnTo>
-                  <a:lnTo>
-                    <a:pt x="15356" y="0"/>
-                  </a:lnTo>
-                  <a:lnTo>
-                    <a:pt x="0" y="0"/>
-                  </a:lnTo>
-                  <a:close/>
-                  <a:moveTo>
-                    <a:pt x="14748" y="8038"/>
-                  </a:moveTo>
-                  <a:lnTo>
-                    <a:pt x="600" y="8038"/>
-                  </a:lnTo>
-                  <a:lnTo>
-                    <a:pt x="600" y="592"/>
-                  </a:lnTo>
-                  <a:lnTo>
-                    <a:pt x="14748" y="592"/>
-                  </a:lnTo>
-                  <a:lnTo>
-                    <a:pt x="14748" y="8038"/>
-                  </a:lnTo>
-                  <a:close/>
-                </a:path>
-              </a:pathLst>
-            </a:custGeom>
-            <a:solidFill>
-              <a:srgbClr val="FFFFFF"/>
-            </a:solidFill>
-            <a:ln>
-              <a:noFill/>
-            </a:ln>
-          </p:spPr>
-          <p:txBody>
-            <a:bodyPr/>
-            <a:lstStyle/>
-            <a:p>
-              <a:endParaRPr lang="en-IN"/>
-            </a:p>
-          </p:txBody>
-        </p:sp>
-      </p:grpSp>
-      <p:sp>
-        <p:nvSpPr>
-          <p:cNvPr id="2" name="TextBox 1">
-            <a:extLst>
-              <a:ext uri="{FF2B5EF4-FFF2-40B4-BE49-F238E27FC236}">
-                <a16:creationId xmlns:a16="http://schemas.microsoft.com/office/drawing/2014/main" id="{3A00AD0E-B8D2-490F-8BE8-74AE27121C95}"/>
-              </a:ext>
-            </a:extLst>
-          </p:cNvPr>
-          <p:cNvSpPr txBox="1"/>
-          <p:nvPr/>
-        </p:nvSpPr>
-        <p:spPr>
-          <a:xfrm>
-            <a:off x="1683171" y="1169773"/>
-            <a:ext cx="8825658" cy="2870161"/>
-          </a:xfrm>
-          <a:prstGeom prst="rect">
-            <a:avLst/>
-          </a:prstGeom>
-        </p:spPr>
-        <p:txBody>
-          <a:bodyPr vert="horz" lIns="91440" tIns="45720" rIns="91440" bIns="45720" rtlCol="0" anchor="b">
-            <a:normAutofit/>
-          </a:bodyPr>
-          <a:lstStyle/>
-          <a:p>
-            <a:pPr algn="ctr">
-              <a:spcBef>
-                <a:spcPct val="0"/>
-              </a:spcBef>
-              <a:spcAft>
-                <a:spcPts val="600"/>
-              </a:spcAft>
-            </a:pPr>
-            <a:r>
-              <a:rPr lang="en-US" sz="5400" u="sng">
-                <a:latin typeface="+mj-lt"/>
-                <a:ea typeface="+mj-ea"/>
-                <a:cs typeface="+mj-cs"/>
-              </a:rPr>
-              <a:t>ElectroHub</a:t>
-            </a:r>
-          </a:p>
-        </p:txBody>
-      </p:sp>
-      <p:cxnSp>
-        <p:nvCxnSpPr>
-          <p:cNvPr id="50" name="Straight Connector 49">
-            <a:extLst>
-              <a:ext uri="{FF2B5EF4-FFF2-40B4-BE49-F238E27FC236}">
-                <a16:creationId xmlns:a16="http://schemas.microsoft.com/office/drawing/2014/main" id="{E81F53E2-F556-42FA-8D24-113839EE19F8}"/>
-              </a:ext>
-              <a:ext uri="{C183D7F6-B498-43B3-948B-1728B52AA6E4}">
-                <adec:decorative xmlns:adec="http://schemas.microsoft.com/office/drawing/2017/decorative" val="1"/>
-              </a:ext>
-            </a:extLst>
-          </p:cNvPr>
-          <p:cNvCxnSpPr>
-            <a:cxnSpLocks noGrp="1" noRot="1" noChangeAspect="1" noMove="1" noResize="1" noEditPoints="1" noAdjustHandles="1" noChangeArrowheads="1" noChangeShapeType="1"/>
-          </p:cNvCxnSpPr>
-          <p:nvPr>
-            <p:extLst>
-              <p:ext uri="{386F3935-93C4-4BCD-93E2-E3B085C9AB24}">
-                <p16:designElem xmlns:p16="http://schemas.microsoft.com/office/powerpoint/2015/main" val="1"/>
-              </p:ext>
-            </p:extLst>
-          </p:nvPr>
-        </p:nvCxnSpPr>
-        <p:spPr>
-          <a:xfrm>
-            <a:off x="5758249" y="4166888"/>
-            <a:ext cx="675502" cy="0"/>
-          </a:xfrm>
-          <a:prstGeom prst="line">
-            <a:avLst/>
-          </a:prstGeom>
-          <a:ln w="19050">
-            <a:solidFill>
-              <a:srgbClr val="FFFFFF"/>
-            </a:solidFill>
-          </a:ln>
-        </p:spPr>
-        <p:style>
-          <a:lnRef idx="1">
-            <a:schemeClr val="accent1"/>
-          </a:lnRef>
-          <a:fillRef idx="0">
-            <a:schemeClr val="accent1"/>
-          </a:fillRef>
-          <a:effectRef idx="0">
-            <a:schemeClr val="accent1"/>
-          </a:effectRef>
-          <a:fontRef idx="minor">
-            <a:schemeClr val="tx1"/>
-          </a:fontRef>
-        </p:style>
-      </p:cxnSp>
-    </p:spTree>
-    <p:extLst>
-      <p:ext uri="{BB962C8B-B14F-4D97-AF65-F5344CB8AC3E}">
-        <p14:creationId xmlns:p14="http://schemas.microsoft.com/office/powerpoint/2010/main" val="4248692715"/>
-      </p:ext>
-    </p:extLst>
-  </p:cSld>
-  <p:clrMapOvr>
-    <a:overrideClrMapping bg1="dk1" tx1="lt1" bg2="dk2" tx2="lt2" accent1="accent1" accent2="accent2" accent3="accent3" accent4="accent4" accent5="accent5" accent6="accent6" hlink="hlink" folHlink="folHlink"/>
-  </p:clrMapOvr>
-</p:sld>
-</file>
-
-<file path=ppt/slides/slide2.xml><?xml version="1.0" encoding="utf-8"?>
-<p:sld xmlns:a="http://schemas.openxmlformats.org/drawingml/2006/main" xmlns:r="http://schemas.openxmlformats.org/officeDocument/2006/relationships" xmlns:p="http://schemas.openxmlformats.org/presentationml/2006/main">
-  <p:cSld>
-    <p:bg>
-      <p:bgPr>
-        <a:solidFill>
-          <a:schemeClr val="bg1"/>
-        </a:solidFill>
-        <a:effectLst/>
-      </p:bgPr>
-    </p:bg>
-    <p:spTree>
-      <p:nvGrpSpPr>
-        <p:cNvPr id="1" name=""/>
-        <p:cNvGrpSpPr/>
-        <p:nvPr/>
-      </p:nvGrpSpPr>
-      <p:grpSpPr>
-        <a:xfrm>
-          <a:off x="0" y="0"/>
-          <a:ext cx="0" cy="0"/>
-          <a:chOff x="0" y="0"/>
-          <a:chExt cx="0" cy="0"/>
-        </a:xfrm>
-      </p:grpSpPr>
-      <p:sp>
-        <p:nvSpPr>
-          <p:cNvPr id="17" name="Rectangle 16">
-            <a:extLst>
-              <a:ext uri="{FF2B5EF4-FFF2-40B4-BE49-F238E27FC236}">
-                <a16:creationId xmlns:a16="http://schemas.microsoft.com/office/drawing/2014/main" id="{4F78DAAE-B0C3-49A3-8AB1-AD2FF0E3686F}"/>
-              </a:ext>
-              <a:ext uri="{C183D7F6-B498-43B3-948B-1728B52AA6E4}">
-                <adec:decorative xmlns:adec="http://schemas.microsoft.com/office/drawing/2017/decorative" val="1"/>
-              </a:ext>
-            </a:extLst>
-          </p:cNvPr>
-          <p:cNvSpPr>
-            <a:spLocks noGrp="1" noRot="1" noChangeAspect="1" noMove="1" noResize="1" noEditPoints="1" noAdjustHandles="1" noChangeArrowheads="1" noChangeShapeType="1" noTextEdit="1"/>
-          </p:cNvSpPr>
-          <p:nvPr>
-            <p:extLst>
-              <p:ext uri="{386F3935-93C4-4BCD-93E2-E3B085C9AB24}">
-                <p16:designElem xmlns:p16="http://schemas.microsoft.com/office/powerpoint/2015/main" val="1"/>
-              </p:ext>
-            </p:extLst>
-          </p:nvPr>
-        </p:nvSpPr>
-        <p:spPr>
-          <a:xfrm>
-            <a:off x="0" y="0"/>
-            <a:ext cx="12192000" cy="6858000"/>
-          </a:xfrm>
-          <a:prstGeom prst="rect">
-            <a:avLst/>
-          </a:prstGeom>
-          <a:ln>
-            <a:noFill/>
-          </a:ln>
-        </p:spPr>
-        <p:style>
-          <a:lnRef idx="2">
-            <a:schemeClr val="accent1">
-              <a:shade val="50000"/>
-            </a:schemeClr>
-          </a:lnRef>
-          <a:fillRef idx="1003">
-            <a:schemeClr val="dk2"/>
-          </a:fillRef>
-          <a:effectRef idx="0">
-            <a:schemeClr val="accent1"/>
-          </a:effectRef>
-          <a:fontRef idx="minor">
-            <a:schemeClr val="lt1"/>
-          </a:fontRef>
-        </p:style>
-        <p:txBody>
-          <a:bodyPr/>
-          <a:lstStyle/>
-          <a:p>
-            <a:endParaRPr lang="en-US" dirty="0"/>
-          </a:p>
-        </p:txBody>
-      </p:sp>
-      <p:sp>
-        <p:nvSpPr>
-          <p:cNvPr id="19" name="Rectangle 18">
-            <a:extLst>
-              <a:ext uri="{FF2B5EF4-FFF2-40B4-BE49-F238E27FC236}">
-                <a16:creationId xmlns:a16="http://schemas.microsoft.com/office/drawing/2014/main" id="{F6A8A81D-3338-4B0F-A26F-A3D259D27681}"/>
-              </a:ext>
-              <a:ext uri="{C183D7F6-B498-43B3-948B-1728B52AA6E4}">
-                <adec:decorative xmlns:adec="http://schemas.microsoft.com/office/drawing/2017/decorative" val="1"/>
-              </a:ext>
-            </a:extLst>
-          </p:cNvPr>
-          <p:cNvSpPr>
-            <a:spLocks noGrp="1" noRot="1" noChangeAspect="1" noMove="1" noResize="1" noEditPoints="1" noAdjustHandles="1" noChangeArrowheads="1" noChangeShapeType="1" noTextEdit="1"/>
-          </p:cNvSpPr>
-          <p:nvPr>
-            <p:extLst>
-              <p:ext uri="{386F3935-93C4-4BCD-93E2-E3B085C9AB24}">
-                <p16:designElem xmlns:p16="http://schemas.microsoft.com/office/powerpoint/2015/main" val="1"/>
-              </p:ext>
-            </p:extLst>
-          </p:nvPr>
-        </p:nvSpPr>
-        <p:spPr>
-          <a:xfrm>
-            <a:off x="643466" y="801794"/>
-            <a:ext cx="11000237" cy="5248266"/>
-          </a:xfrm>
-          <a:prstGeom prst="rect">
-            <a:avLst/>
-          </a:prstGeom>
-          <a:solidFill>
-            <a:srgbClr val="FFFFFF"/>
-          </a:solidFill>
-          <a:ln>
-            <a:noFill/>
-          </a:ln>
-        </p:spPr>
-        <p:style>
-          <a:lnRef idx="2">
-            <a:schemeClr val="accent1">
-              <a:shade val="50000"/>
-            </a:schemeClr>
-          </a:lnRef>
-          <a:fillRef idx="1">
-            <a:schemeClr val="accent1"/>
-          </a:fillRef>
-          <a:effectRef idx="0">
-            <a:schemeClr val="accent1"/>
-          </a:effectRef>
-          <a:fontRef idx="minor">
-            <a:schemeClr val="lt1"/>
-          </a:fontRef>
-        </p:style>
-        <p:txBody>
-          <a:bodyPr rtlCol="0" anchor="ctr"/>
-          <a:lstStyle/>
-          <a:p>
-            <a:pPr algn="ctr"/>
-            <a:endParaRPr lang="en-US"/>
-          </a:p>
-        </p:txBody>
-      </p:sp>
-      <p:sp>
-        <p:nvSpPr>
-          <p:cNvPr id="21" name="Rectangle 20">
-            <a:extLst>
-              <a:ext uri="{FF2B5EF4-FFF2-40B4-BE49-F238E27FC236}">
-                <a16:creationId xmlns:a16="http://schemas.microsoft.com/office/drawing/2014/main" id="{40155665-7CE2-4939-AE5E-020DC1D20753}"/>
-              </a:ext>
-              <a:ext uri="{C183D7F6-B498-43B3-948B-1728B52AA6E4}">
-                <adec:decorative xmlns:adec="http://schemas.microsoft.com/office/drawing/2017/decorative" val="1"/>
-              </a:ext>
-            </a:extLst>
-          </p:cNvPr>
-          <p:cNvSpPr>
-            <a:spLocks noGrp="1" noRot="1" noChangeAspect="1" noMove="1" noResize="1" noEditPoints="1" noAdjustHandles="1" noChangeArrowheads="1" noChangeShapeType="1" noTextEdit="1"/>
-          </p:cNvSpPr>
-          <p:nvPr>
-            <p:extLst>
-              <p:ext uri="{386F3935-93C4-4BCD-93E2-E3B085C9AB24}">
-                <p16:designElem xmlns:p16="http://schemas.microsoft.com/office/powerpoint/2015/main" val="1"/>
-              </p:ext>
-            </p:extLst>
-          </p:nvPr>
-        </p:nvSpPr>
-        <p:spPr>
-          <a:xfrm>
-            <a:off x="10437812" y="0"/>
-            <a:ext cx="685800" cy="1143000"/>
-          </a:xfrm>
-          <a:prstGeom prst="rect">
-            <a:avLst/>
-          </a:prstGeom>
-          <a:solidFill>
-            <a:schemeClr val="accent1"/>
-          </a:solidFill>
-          <a:ln>
-            <a:noFill/>
-          </a:ln>
-        </p:spPr>
-        <p:style>
-          <a:lnRef idx="1">
-            <a:schemeClr val="accent1"/>
-          </a:lnRef>
-          <a:fillRef idx="3">
-            <a:schemeClr val="accent1"/>
-          </a:fillRef>
-          <a:effectRef idx="2">
-            <a:schemeClr val="accent1"/>
-          </a:effectRef>
-          <a:fontRef idx="minor">
-            <a:schemeClr val="lt1"/>
-          </a:fontRef>
-        </p:style>
-        <p:txBody>
-          <a:bodyPr/>
-          <a:lstStyle/>
-          <a:p>
-            <a:endParaRPr lang="en-IN"/>
-          </a:p>
-        </p:txBody>
-      </p:sp>
-      <p:graphicFrame>
-        <p:nvGraphicFramePr>
-          <p:cNvPr id="3" name="Table 2">
-            <a:extLst>
-              <a:ext uri="{FF2B5EF4-FFF2-40B4-BE49-F238E27FC236}">
-                <a16:creationId xmlns:a16="http://schemas.microsoft.com/office/drawing/2014/main" id="{60FAA0EC-FB17-D52E-204F-2D1A90843FD9}"/>
-              </a:ext>
-            </a:extLst>
-          </p:cNvPr>
-          <p:cNvGraphicFramePr>
-            <a:graphicFrameLocks noGrp="1"/>
-          </p:cNvGraphicFramePr>
-          <p:nvPr>
-            <p:extLst>
-              <p:ext uri="{D42A27DB-BD31-4B8C-83A1-F6EECF244321}">
-                <p14:modId xmlns:p14="http://schemas.microsoft.com/office/powerpoint/2010/main" val="2021431545"/>
-              </p:ext>
-            </p:extLst>
-          </p:nvPr>
-        </p:nvGraphicFramePr>
-        <p:xfrm>
-          <a:off x="2699074" y="1284394"/>
-          <a:ext cx="6889021" cy="4283072"/>
-        </p:xfrm>
-        <a:graphic>
-          <a:graphicData uri="http://schemas.openxmlformats.org/drawingml/2006/table">
-            <a:tbl>
-              <a:tblPr>
-                <a:tableStyleId>{5C22544A-7EE6-4342-B048-85BDC9FD1C3A}</a:tableStyleId>
-              </a:tblPr>
-              <a:tblGrid>
-                <a:gridCol w="6889021">
-                  <a:extLst>
-                    <a:ext uri="{9D8B030D-6E8A-4147-A177-3AD203B41FA5}">
-                      <a16:colId xmlns:a16="http://schemas.microsoft.com/office/drawing/2014/main" val="3587176226"/>
-                    </a:ext>
-                  </a:extLst>
-                </a:gridCol>
-              </a:tblGrid>
-              <a:tr h="535384">
-                <a:tc>
-                  <a:txBody>
-                    <a:bodyPr/>
-                    <a:lstStyle/>
-                    <a:p>
-                      <a:pPr algn="l" fontAlgn="ctr"/>
-                      <a:r>
-                        <a:rPr lang="en-IN" sz="3100" u="none" strike="noStrike">
-                          <a:effectLst/>
-                        </a:rPr>
-                        <a:t>Electronics</a:t>
-                      </a:r>
-                      <a:endParaRPr lang="en-IN" sz="3100" b="0" i="0" u="none" strike="noStrike">
-                        <a:solidFill>
-                          <a:srgbClr val="000000"/>
-                        </a:solidFill>
-                        <a:effectLst/>
-                        <a:latin typeface="Calibri" panose="020F0502020204030204" pitchFamily="34" charset="0"/>
-                      </a:endParaRPr>
-                    </a:p>
-                  </a:txBody>
-                  <a:tcPr marL="21764" marR="21764" marT="21764" marB="0" anchor="ctr"/>
-                </a:tc>
-                <a:extLst>
-                  <a:ext uri="{0D108BD9-81ED-4DB2-BD59-A6C34878D82A}">
-                    <a16:rowId xmlns:a16="http://schemas.microsoft.com/office/drawing/2014/main" val="220928847"/>
-                  </a:ext>
-                </a:extLst>
-              </a:tr>
-              <a:tr h="535384">
-                <a:tc>
-                  <a:txBody>
-                    <a:bodyPr/>
-                    <a:lstStyle/>
-                    <a:p>
-                      <a:pPr algn="l" fontAlgn="ctr"/>
-                      <a:r>
-                        <a:rPr lang="en-IN" sz="3100" u="none" strike="noStrike">
-                          <a:effectLst/>
-                        </a:rPr>
-                        <a:t>Footwear</a:t>
-                      </a:r>
-                      <a:endParaRPr lang="en-IN" sz="3100" b="0" i="0" u="none" strike="noStrike">
-                        <a:solidFill>
-                          <a:srgbClr val="000000"/>
-                        </a:solidFill>
-                        <a:effectLst/>
-                        <a:latin typeface="Calibri" panose="020F0502020204030204" pitchFamily="34" charset="0"/>
-                      </a:endParaRPr>
-                    </a:p>
-                  </a:txBody>
-                  <a:tcPr marL="21764" marR="21764" marT="21764" marB="0" anchor="ctr"/>
-                </a:tc>
-                <a:extLst>
-                  <a:ext uri="{0D108BD9-81ED-4DB2-BD59-A6C34878D82A}">
-                    <a16:rowId xmlns:a16="http://schemas.microsoft.com/office/drawing/2014/main" val="1623745574"/>
-                  </a:ext>
-                </a:extLst>
-              </a:tr>
-              <a:tr h="535384">
-                <a:tc>
-                  <a:txBody>
-                    <a:bodyPr/>
-                    <a:lstStyle/>
-                    <a:p>
-                      <a:pPr algn="l" fontAlgn="ctr"/>
-                      <a:r>
-                        <a:rPr lang="en-IN" sz="3100" u="none" strike="noStrike">
-                          <a:effectLst/>
-                        </a:rPr>
-                        <a:t>Clothing</a:t>
-                      </a:r>
-                      <a:endParaRPr lang="en-IN" sz="3100" b="0" i="0" u="none" strike="noStrike">
-                        <a:solidFill>
-                          <a:srgbClr val="000000"/>
-                        </a:solidFill>
-                        <a:effectLst/>
-                        <a:latin typeface="Calibri" panose="020F0502020204030204" pitchFamily="34" charset="0"/>
-                      </a:endParaRPr>
-                    </a:p>
-                  </a:txBody>
-                  <a:tcPr marL="21764" marR="21764" marT="21764" marB="0" anchor="ctr"/>
-                </a:tc>
-                <a:extLst>
-                  <a:ext uri="{0D108BD9-81ED-4DB2-BD59-A6C34878D82A}">
-                    <a16:rowId xmlns:a16="http://schemas.microsoft.com/office/drawing/2014/main" val="1888959131"/>
-                  </a:ext>
-                </a:extLst>
-              </a:tr>
-              <a:tr h="535384">
-                <a:tc>
-                  <a:txBody>
-                    <a:bodyPr/>
-                    <a:lstStyle/>
-                    <a:p>
-                      <a:pPr algn="l" fontAlgn="ctr"/>
-                      <a:r>
-                        <a:rPr lang="en-IN" sz="3100" u="none" strike="noStrike">
-                          <a:effectLst/>
-                        </a:rPr>
-                        <a:t>Home Appliances</a:t>
-                      </a:r>
-                      <a:endParaRPr lang="en-IN" sz="3100" b="0" i="0" u="none" strike="noStrike">
-                        <a:solidFill>
-                          <a:srgbClr val="000000"/>
-                        </a:solidFill>
-                        <a:effectLst/>
-                        <a:latin typeface="Calibri" panose="020F0502020204030204" pitchFamily="34" charset="0"/>
-                      </a:endParaRPr>
-                    </a:p>
-                  </a:txBody>
-                  <a:tcPr marL="21764" marR="21764" marT="21764" marB="0" anchor="ctr"/>
-                </a:tc>
-                <a:extLst>
-                  <a:ext uri="{0D108BD9-81ED-4DB2-BD59-A6C34878D82A}">
-                    <a16:rowId xmlns:a16="http://schemas.microsoft.com/office/drawing/2014/main" val="1614325287"/>
-                  </a:ext>
-                </a:extLst>
-              </a:tr>
-              <a:tr h="535384">
-                <a:tc>
-                  <a:txBody>
-                    <a:bodyPr/>
-                    <a:lstStyle/>
-                    <a:p>
-                      <a:pPr algn="l" fontAlgn="ctr"/>
-                      <a:r>
-                        <a:rPr lang="en-IN" sz="3100" u="none" strike="noStrike">
-                          <a:effectLst/>
-                        </a:rPr>
-                        <a:t>Accessories</a:t>
-                      </a:r>
-                      <a:endParaRPr lang="en-IN" sz="3100" b="0" i="0" u="none" strike="noStrike">
-                        <a:solidFill>
-                          <a:srgbClr val="000000"/>
-                        </a:solidFill>
-                        <a:effectLst/>
-                        <a:latin typeface="Calibri" panose="020F0502020204030204" pitchFamily="34" charset="0"/>
-                      </a:endParaRPr>
-                    </a:p>
-                  </a:txBody>
-                  <a:tcPr marL="21764" marR="21764" marT="21764" marB="0" anchor="ctr"/>
-                </a:tc>
-                <a:extLst>
-                  <a:ext uri="{0D108BD9-81ED-4DB2-BD59-A6C34878D82A}">
-                    <a16:rowId xmlns:a16="http://schemas.microsoft.com/office/drawing/2014/main" val="824281318"/>
-                  </a:ext>
-                </a:extLst>
-              </a:tr>
-              <a:tr h="535384">
-                <a:tc>
-                  <a:txBody>
-                    <a:bodyPr/>
-                    <a:lstStyle/>
-                    <a:p>
-                      <a:pPr algn="l" fontAlgn="ctr"/>
-                      <a:r>
-                        <a:rPr lang="en-IN" sz="3100" u="none" strike="noStrike">
-                          <a:effectLst/>
-                        </a:rPr>
-                        <a:t>Kitchenware</a:t>
-                      </a:r>
-                      <a:endParaRPr lang="en-IN" sz="3100" b="0" i="0" u="none" strike="noStrike">
-                        <a:solidFill>
-                          <a:srgbClr val="000000"/>
-                        </a:solidFill>
-                        <a:effectLst/>
-                        <a:latin typeface="Calibri" panose="020F0502020204030204" pitchFamily="34" charset="0"/>
-                      </a:endParaRPr>
-                    </a:p>
-                  </a:txBody>
-                  <a:tcPr marL="21764" marR="21764" marT="21764" marB="0" anchor="ctr"/>
-                </a:tc>
-                <a:extLst>
-                  <a:ext uri="{0D108BD9-81ED-4DB2-BD59-A6C34878D82A}">
-                    <a16:rowId xmlns:a16="http://schemas.microsoft.com/office/drawing/2014/main" val="1545064344"/>
-                  </a:ext>
-                </a:extLst>
-              </a:tr>
-              <a:tr h="535384">
-                <a:tc>
-                  <a:txBody>
-                    <a:bodyPr/>
-                    <a:lstStyle/>
-                    <a:p>
-                      <a:pPr algn="l" fontAlgn="ctr"/>
-                      <a:r>
-                        <a:rPr lang="en-IN" sz="3100" u="none" strike="noStrike">
-                          <a:effectLst/>
-                        </a:rPr>
-                        <a:t>Bags</a:t>
-                      </a:r>
-                      <a:endParaRPr lang="en-IN" sz="3100" b="0" i="0" u="none" strike="noStrike">
-                        <a:solidFill>
-                          <a:srgbClr val="000000"/>
-                        </a:solidFill>
-                        <a:effectLst/>
-                        <a:latin typeface="Calibri" panose="020F0502020204030204" pitchFamily="34" charset="0"/>
-                      </a:endParaRPr>
-                    </a:p>
-                  </a:txBody>
-                  <a:tcPr marL="21764" marR="21764" marT="21764" marB="0" anchor="ctr"/>
-                </a:tc>
-                <a:extLst>
-                  <a:ext uri="{0D108BD9-81ED-4DB2-BD59-A6C34878D82A}">
-                    <a16:rowId xmlns:a16="http://schemas.microsoft.com/office/drawing/2014/main" val="1597557471"/>
-                  </a:ext>
-                </a:extLst>
-              </a:tr>
-              <a:tr h="535384">
-                <a:tc>
-                  <a:txBody>
-                    <a:bodyPr/>
-                    <a:lstStyle/>
-                    <a:p>
-                      <a:pPr algn="l" fontAlgn="ctr"/>
-                      <a:r>
-                        <a:rPr lang="en-IN" sz="3100" u="none" strike="noStrike">
-                          <a:effectLst/>
-                        </a:rPr>
-                        <a:t>Personal Care</a:t>
-                      </a:r>
-                      <a:endParaRPr lang="en-IN" sz="3100" b="0" i="0" u="none" strike="noStrike">
-                        <a:solidFill>
-                          <a:srgbClr val="000000"/>
-                        </a:solidFill>
-                        <a:effectLst/>
-                        <a:latin typeface="Calibri" panose="020F0502020204030204" pitchFamily="34" charset="0"/>
-                      </a:endParaRPr>
-                    </a:p>
-                  </a:txBody>
-                  <a:tcPr marL="21764" marR="21764" marT="21764" marB="0" anchor="ctr"/>
-                </a:tc>
-                <a:extLst>
-                  <a:ext uri="{0D108BD9-81ED-4DB2-BD59-A6C34878D82A}">
-                    <a16:rowId xmlns:a16="http://schemas.microsoft.com/office/drawing/2014/main" val="2617950394"/>
-                  </a:ext>
-                </a:extLst>
-              </a:tr>
-            </a:tbl>
-          </a:graphicData>
-        </a:graphic>
-      </p:graphicFrame>
-    </p:spTree>
-    <p:extLst>
-      <p:ext uri="{BB962C8B-B14F-4D97-AF65-F5344CB8AC3E}">
-        <p14:creationId xmlns:p14="http://schemas.microsoft.com/office/powerpoint/2010/main" val="1215740050"/>
-      </p:ext>
-    </p:extLst>
-  </p:cSld>
-  <p:clrMapOvr>
-    <a:masterClrMapping/>
-  </p:clrMapOvr>
-</p:sld>
-</file>
-
-<file path=ppt/slides/slide3.xml><?xml version="1.0" encoding="utf-8"?>
-<p:sld xmlns:a="http://schemas.openxmlformats.org/drawingml/2006/main" xmlns:r="http://schemas.openxmlformats.org/officeDocument/2006/relationships" xmlns:p="http://schemas.openxmlformats.org/presentationml/2006/main">
-  <p:cSld>
     <p:spTree>
       <p:nvGrpSpPr>
         <p:cNvPr id="1" name=""/>
@@ -14360,7 +13274,7 @@
         <p:spPr>
           <a:xfrm>
             <a:off x="727587" y="1229032"/>
-            <a:ext cx="9448800" cy="5693866"/>
+            <a:ext cx="9448800" cy="6555641"/>
           </a:xfrm>
           <a:prstGeom prst="rect">
             <a:avLst/>
@@ -14372,6 +13286,22 @@
             <a:spAutoFit/>
           </a:bodyPr>
           <a:lstStyle/>
+          <a:p>
+            <a:pPr algn="ctr"/>
+            <a:r>
+              <a:rPr lang="en-IN" sz="2800" b="1" u="sng" dirty="0">
+                <a:latin typeface="Aparajita" panose="02020603050405020304" pitchFamily="18" charset="0"/>
+                <a:cs typeface="Aparajita" panose="02020603050405020304" pitchFamily="18" charset="0"/>
+              </a:rPr>
+              <a:t>Objectives Of Dashboard</a:t>
+            </a:r>
+          </a:p>
+          <a:p>
+            <a:endParaRPr lang="en-IN" sz="2800" dirty="0">
+              <a:latin typeface="Aparajita" panose="02020603050405020304" pitchFamily="18" charset="0"/>
+              <a:cs typeface="Aparajita" panose="02020603050405020304" pitchFamily="18" charset="0"/>
+            </a:endParaRPr>
+          </a:p>
           <a:p>
             <a:r>
               <a:rPr lang="en-IN" sz="2800" dirty="0">
